--- a/03-课件PPT/讲次版/第6章-1-讲次 6-1 · 模型服务与推理部署.pptx
+++ b/03-课件PPT/讲次版/第6章-1-讲次 6-1 · 模型服务与推理部署.pptx
@@ -18085,7 +18085,7 @@
           <a:noFill/>
         </p:spPr>
         <p:txBody>
-          <a:bodyPr wrap="none" anchor="ctr">
+          <a:bodyPr wrap="square" anchor="ctr">
             <a:spAutoFit/>
           </a:bodyPr>
           <a:lstStyle/>
@@ -18096,7 +18096,7 @@
               </a:lnSpc>
             </a:pPr>
             <a:r>
-              <a:rPr sz="1100" b="1">
+              <a:rPr sz="1300" b="1">
                 <a:solidFill>
                   <a:srgbClr val="0B1D3A"/>
                 </a:solidFill>
@@ -18467,7 +18467,7 @@
           <a:noFill/>
         </p:spPr>
         <p:txBody>
-          <a:bodyPr wrap="none" anchor="ctr">
+          <a:bodyPr wrap="square" anchor="ctr">
             <a:spAutoFit/>
           </a:bodyPr>
           <a:lstStyle/>
@@ -18478,7 +18478,7 @@
               </a:lnSpc>
             </a:pPr>
             <a:r>
-              <a:rPr sz="1100" b="1">
+              <a:rPr sz="1300" b="1">
                 <a:solidFill>
                   <a:srgbClr val="0B1D3A"/>
                 </a:solidFill>
@@ -18849,7 +18849,7 @@
           <a:noFill/>
         </p:spPr>
         <p:txBody>
-          <a:bodyPr wrap="none" anchor="ctr">
+          <a:bodyPr wrap="square" anchor="ctr">
             <a:spAutoFit/>
           </a:bodyPr>
           <a:lstStyle/>
@@ -18860,7 +18860,7 @@
               </a:lnSpc>
             </a:pPr>
             <a:r>
-              <a:rPr sz="1100" b="1">
+              <a:rPr sz="1300" b="1">
                 <a:solidFill>
                   <a:srgbClr val="0B1D3A"/>
                 </a:solidFill>
@@ -19231,7 +19231,7 @@
           <a:noFill/>
         </p:spPr>
         <p:txBody>
-          <a:bodyPr wrap="none" anchor="ctr">
+          <a:bodyPr wrap="square" anchor="ctr">
             <a:spAutoFit/>
           </a:bodyPr>
           <a:lstStyle/>
@@ -30142,7 +30142,7 @@
           <a:noFill/>
         </p:spPr>
         <p:txBody>
-          <a:bodyPr wrap="none" anchor="ctr">
+          <a:bodyPr wrap="square" anchor="ctr">
             <a:spAutoFit/>
           </a:bodyPr>
           <a:lstStyle/>
@@ -30153,7 +30153,7 @@
               </a:lnSpc>
             </a:pPr>
             <a:r>
-              <a:rPr sz="900" b="1">
+              <a:rPr sz="1300" b="1">
                 <a:solidFill>
                   <a:srgbClr val="0B1D3A"/>
                 </a:solidFill>
@@ -30273,7 +30273,7 @@
           <a:noFill/>
         </p:spPr>
         <p:txBody>
-          <a:bodyPr wrap="none" anchor="ctr">
+          <a:bodyPr wrap="square" anchor="ctr">
             <a:spAutoFit/>
           </a:bodyPr>
           <a:lstStyle/>
@@ -30655,7 +30655,7 @@
           <a:noFill/>
         </p:spPr>
         <p:txBody>
-          <a:bodyPr wrap="none" anchor="ctr">
+          <a:bodyPr wrap="square" anchor="ctr">
             <a:spAutoFit/>
           </a:bodyPr>
           <a:lstStyle/>
@@ -30666,7 +30666,7 @@
               </a:lnSpc>
             </a:pPr>
             <a:r>
-              <a:rPr sz="1100" b="1">
+              <a:rPr sz="1300" b="1">
                 <a:solidFill>
                   <a:srgbClr val="0B1D3A"/>
                 </a:solidFill>
@@ -30786,7 +30786,7 @@
           <a:noFill/>
         </p:spPr>
         <p:txBody>
-          <a:bodyPr wrap="none" anchor="ctr">
+          <a:bodyPr wrap="square" anchor="ctr">
             <a:spAutoFit/>
           </a:bodyPr>
           <a:lstStyle/>
@@ -31168,7 +31168,7 @@
           <a:noFill/>
         </p:spPr>
         <p:txBody>
-          <a:bodyPr wrap="none" anchor="ctr">
+          <a:bodyPr wrap="square" anchor="ctr">
             <a:spAutoFit/>
           </a:bodyPr>
           <a:lstStyle/>
@@ -31179,7 +31179,7 @@
               </a:lnSpc>
             </a:pPr>
             <a:r>
-              <a:rPr sz="1100" b="1">
+              <a:rPr sz="1300" b="1">
                 <a:solidFill>
                   <a:srgbClr val="0B1D3A"/>
                 </a:solidFill>
@@ -31299,7 +31299,7 @@
           <a:noFill/>
         </p:spPr>
         <p:txBody>
-          <a:bodyPr wrap="none" anchor="ctr">
+          <a:bodyPr wrap="square" anchor="ctr">
             <a:spAutoFit/>
           </a:bodyPr>
           <a:lstStyle/>
@@ -31681,7 +31681,7 @@
           <a:noFill/>
         </p:spPr>
         <p:txBody>
-          <a:bodyPr wrap="none" anchor="ctr">
+          <a:bodyPr wrap="square" anchor="ctr">
             <a:spAutoFit/>
           </a:bodyPr>
           <a:lstStyle/>
@@ -32120,7 +32120,7 @@
           <a:noFill/>
         </p:spPr>
         <p:txBody>
-          <a:bodyPr wrap="none" anchor="ctr">
+          <a:bodyPr wrap="square" anchor="ctr">
             <a:spAutoFit/>
           </a:bodyPr>
           <a:lstStyle/>
@@ -32131,7 +32131,7 @@
               </a:lnSpc>
             </a:pPr>
             <a:r>
-              <a:rPr sz="900" b="1">
+              <a:rPr sz="1300" b="1">
                 <a:solidFill>
                   <a:srgbClr val="0B1D3A"/>
                 </a:solidFill>
@@ -32251,7 +32251,7 @@
           <a:noFill/>
         </p:spPr>
         <p:txBody>
-          <a:bodyPr wrap="none" anchor="ctr">
+          <a:bodyPr wrap="square" anchor="ctr">
             <a:spAutoFit/>
           </a:bodyPr>
           <a:lstStyle/>
@@ -32633,7 +32633,7 @@
           <a:noFill/>
         </p:spPr>
         <p:txBody>
-          <a:bodyPr wrap="none" anchor="ctr">
+          <a:bodyPr wrap="square" anchor="ctr">
             <a:spAutoFit/>
           </a:bodyPr>
           <a:lstStyle/>
@@ -32644,7 +32644,7 @@
               </a:lnSpc>
             </a:pPr>
             <a:r>
-              <a:rPr sz="1100" b="1">
+              <a:rPr sz="1300" b="1">
                 <a:solidFill>
                   <a:srgbClr val="0B1D3A"/>
                 </a:solidFill>
@@ -32764,7 +32764,7 @@
           <a:noFill/>
         </p:spPr>
         <p:txBody>
-          <a:bodyPr wrap="none" anchor="ctr">
+          <a:bodyPr wrap="square" anchor="ctr">
             <a:spAutoFit/>
           </a:bodyPr>
           <a:lstStyle/>
@@ -33146,7 +33146,7 @@
           <a:noFill/>
         </p:spPr>
         <p:txBody>
-          <a:bodyPr wrap="none" anchor="ctr">
+          <a:bodyPr wrap="square" anchor="ctr">
             <a:spAutoFit/>
           </a:bodyPr>
           <a:lstStyle/>
@@ -33157,7 +33157,7 @@
               </a:lnSpc>
             </a:pPr>
             <a:r>
-              <a:rPr sz="1100" b="1">
+              <a:rPr sz="1300" b="1">
                 <a:solidFill>
                   <a:srgbClr val="0B1D3A"/>
                 </a:solidFill>
@@ -33277,7 +33277,7 @@
           <a:noFill/>
         </p:spPr>
         <p:txBody>
-          <a:bodyPr wrap="none" anchor="ctr">
+          <a:bodyPr wrap="square" anchor="ctr">
             <a:spAutoFit/>
           </a:bodyPr>
           <a:lstStyle/>
@@ -33408,7 +33408,7 @@
           <a:noFill/>
         </p:spPr>
         <p:txBody>
-          <a:bodyPr wrap="none" anchor="ctr">
+          <a:bodyPr wrap="square" anchor="ctr">
             <a:spAutoFit/>
           </a:bodyPr>
           <a:lstStyle/>
@@ -33790,7 +33790,7 @@
           <a:noFill/>
         </p:spPr>
         <p:txBody>
-          <a:bodyPr wrap="none" anchor="ctr">
+          <a:bodyPr wrap="square" anchor="ctr">
             <a:spAutoFit/>
           </a:bodyPr>
           <a:lstStyle/>
@@ -33801,7 +33801,7 @@
               </a:lnSpc>
             </a:pPr>
             <a:r>
-              <a:rPr sz="1100" b="1">
+              <a:rPr sz="1300" b="1">
                 <a:solidFill>
                   <a:srgbClr val="0B1D3A"/>
                 </a:solidFill>
